--- a/domain-seminars/week03_claims_data_analytics.pptx
+++ b/domain-seminars/week03_claims_data_analytics.pptx
@@ -506,7 +506,7 @@
           <a:lstStyle/>
           <a:p>
             <a:r>
-              <a:t>Domain seminar for week 3: Claims Data Analytics. It follows the course pattern: basics and terminology, where the topic sits in industry and policy, reform goals, how analytics is deployed, and how analytics drives decisions. Replace this note with your own opening remarks.</a:t>
+              <a:t>Domain seminar for week 3: Claims Data Analytics. We will go through basics and terminology, where the topic is found across industry and policy, reform goals, how analytics is deployed, and how analytics drives decisions. Provide opening remarks here.</a:t>
             </a:r>
           </a:p>
         </p:txBody>

--- a/domain-seminars/week03_claims_data_analytics.pptx
+++ b/domain-seminars/week03_claims_data_analytics.pptx
@@ -11,6 +11,7 @@
     <p:sldId id="269" r:id="rId20"/>
     <p:sldId id="270" r:id="rId21"/>
     <p:sldId id="271" r:id="rId22"/>
+    <p:sldId id="272" r:id="rId11"/>
   </p:sldIdLst>
   <p:notesMasterIdLst>
     <p:notesMasterId r:id="rId12"/>
@@ -857,6 +858,76 @@
           <a:p>
             <a:r>
               <a:t>Count only original submissions when computing the initial denial rate, because corrected and rebilled claims are new rows. Ranking by count and ranking by dollars often differ. The best first fix is usually a preventable category where much of the money is never recovered.</a:t>
+            </a:r>
+          </a:p>
+        </p:txBody>
+      </p:sp>
+      <p:sp>
+        <p:nvSpPr>
+          <p:cNvPr id="4" name="Slide Number Placeholder 3"/>
+          <p:cNvSpPr>
+            <a:spLocks noGrp="1"/>
+          </p:cNvSpPr>
+          <p:nvPr>
+            <p:ph type="sldNum" idx="5" sz="quarter"/>
+          </p:nvPr>
+        </p:nvSpPr>
+        <p:spPr/>
+      </p:sp>
+    </p:spTree>
+  </p:cSld>
+  <p:clrMapOvr>
+    <a:masterClrMapping/>
+  </p:clrMapOvr>
+</p:notes>
+</file>
+
+<file path=ppt/notesSlides/notesSlide7.xml><?xml version="1.0" encoding="utf-8"?>
+<p:notes xmlns:a="http://schemas.openxmlformats.org/drawingml/2006/main" xmlns:p="http://schemas.openxmlformats.org/presentationml/2006/main" xmlns:r="http://schemas.openxmlformats.org/officeDocument/2006/relationships">
+  <p:cSld>
+    <p:spTree>
+      <p:nvGrpSpPr>
+        <p:cNvPr id="1" name=""/>
+        <p:cNvGrpSpPr/>
+        <p:nvPr/>
+      </p:nvGrpSpPr>
+      <p:grpSpPr>
+        <a:xfrm>
+          <a:off x="0" y="0"/>
+          <a:ext cx="0" cy="0"/>
+          <a:chOff x="0" y="0"/>
+          <a:chExt cx="0" cy="0"/>
+        </a:xfrm>
+      </p:grpSpPr>
+      <p:sp>
+        <p:nvSpPr>
+          <p:cNvPr id="2" name="Slide Image Placeholder 1"/>
+          <p:cNvSpPr>
+            <a:spLocks noGrp="1"/>
+          </p:cNvSpPr>
+          <p:nvPr>
+            <p:ph type="sldImg" idx="2"/>
+          </p:nvPr>
+        </p:nvSpPr>
+        <p:spPr/>
+      </p:sp>
+      <p:sp>
+        <p:nvSpPr>
+          <p:cNvPr id="3" name="Notes Placeholder 2"/>
+          <p:cNvSpPr>
+            <a:spLocks noGrp="1"/>
+          </p:cNvSpPr>
+          <p:nvPr>
+            <p:ph type="body" idx="3" sz="quarter"/>
+          </p:nvPr>
+        </p:nvSpPr>
+        <p:spPr/>
+        <p:txBody>
+          <a:bodyPr/>
+          <a:lstStyle/>
+          <a:p>
+            <a:r>
+              <a:t>Give students a few minutes to write an answer drawn from their own experience and career, then ask two or three to share. Connect their examples back to this seminar's content. In an online section, post the same question to the discussion board.</a:t>
             </a:r>
           </a:p>
         </p:txBody>
@@ -2572,6 +2643,167 @@
             <a:fld id="{F7021451-1387-4CA6-816F-3879F97B5CBC}" type="slidenum">
               <a:rPr b="0" lang="en-US"/>
               <a:t>6</a:t>
+            </a:fld>
+            <a:endParaRPr lang="en-US"/>
+          </a:p>
+        </p:txBody>
+      </p:sp>
+    </p:spTree>
+  </p:cSld>
+  <p:clrMapOvr>
+    <a:masterClrMapping/>
+  </p:clrMapOvr>
+</p:sld>
+</file>
+
+<file path=ppt/slides/slide7.xml><?xml version="1.0" encoding="utf-8"?>
+<p:sld xmlns:a="http://schemas.openxmlformats.org/drawingml/2006/main" xmlns:p="http://schemas.openxmlformats.org/presentationml/2006/main" xmlns:r="http://schemas.openxmlformats.org/officeDocument/2006/relationships">
+  <p:cSld>
+    <p:spTree>
+      <p:nvGrpSpPr>
+        <p:cNvPr id="1" name=""/>
+        <p:cNvGrpSpPr/>
+        <p:nvPr/>
+      </p:nvGrpSpPr>
+      <p:grpSpPr/>
+      <p:sp>
+        <p:nvSpPr>
+          <p:cNvPr id="2" name="Text 0"/>
+          <p:cNvSpPr/>
+          <p:nvPr>
+            <p:ph idx="100" type="title" hasCustomPrompt="1"/>
+          </p:nvPr>
+        </p:nvSpPr>
+        <p:spPr>
+          <a:xfrm>
+            <a:off x="731520" y="457200"/>
+            <a:ext cx="10698480" cy="822960"/>
+          </a:xfrm>
+          <a:prstGeom prst="rect">
+            <a:avLst/>
+          </a:prstGeom>
+          <a:noFill/>
+          <a:ln/>
+        </p:spPr>
+        <p:txBody>
+          <a:bodyPr wrap="square" lIns="0" tIns="0" rIns="0" bIns="0" rtlCol="0" anchor="t"/>
+          <a:lstStyle/>
+          <a:p>
+            <a:pPr algn="l" indent="0" marL="0">
+              <a:buNone/>
+            </a:pPr>
+            <a:r>
+              <a:rPr lang="en-US" sz="3200" b="1" dirty="0">
+                <a:solidFill>
+                  <a:srgbClr val="FFFFFF"/>
+                </a:solidFill>
+              </a:rPr>
+              <a:t>Discussion</a:t>
+            </a:r>
+            <a:endParaRPr lang="en-US" sz="3200" dirty="0"/>
+          </a:p>
+        </p:txBody>
+      </p:sp>
+      <p:sp>
+        <p:nvSpPr>
+          <p:cNvPr id="3" name="Text 0"/>
+          <p:cNvSpPr/>
+          <p:nvPr>
+            <p:ph idx="101" type="body" hasCustomPrompt="1"/>
+          </p:nvPr>
+        </p:nvSpPr>
+        <p:spPr>
+          <a:xfrm>
+            <a:off x="731520" y="1554480"/>
+            <a:ext cx="10698480" cy="4754880"/>
+          </a:xfrm>
+          <a:prstGeom prst="rect">
+            <a:avLst/>
+          </a:prstGeom>
+          <a:noFill/>
+          <a:ln/>
+        </p:spPr>
+        <p:txBody>
+          <a:bodyPr wrap="square" rtlCol="0" anchor="t"/>
+          <a:lstStyle/>
+          <a:p>
+            <a:pPr algn="l" marL="342900" indent="-342900">
+              <a:spcAft>
+                <a:spcPts val="1000"/>
+              </a:spcAft>
+              <a:buSzPct val="100000"/>
+              <a:buChar char="•"/>
+            </a:pPr>
+            <a:r>
+              <a:rPr lang="en-US" sz="2400" dirty="0">
+                <a:solidFill>
+                  <a:srgbClr val="FFFFFF"/>
+                </a:solidFill>
+              </a:rPr>
+              <a:t>Think of a denial or billing problem you've seen. What data would you need to find its root cause and prevent it next time?</a:t>
+            </a:r>
+            <a:endParaRPr lang="en-US" sz="2400" dirty="0"/>
+          </a:p>
+          <a:p>
+            <a:pPr algn="l" marL="342900" indent="-342900">
+              <a:spcAft>
+                <a:spcPts val="1000"/>
+              </a:spcAft>
+              <a:buSzPct val="100000"/>
+              <a:buChar char="•"/>
+            </a:pPr>
+            <a:r>
+              <a:rPr lang="en-US" sz="2400" dirty="0">
+                <a:solidFill>
+                  <a:srgbClr val="FFFFFF"/>
+                </a:solidFill>
+              </a:rPr>
+              <a:t>Draw on your own experience and career, and apply today's seminar to that setting.</a:t>
+            </a:r>
+            <a:endParaRPr lang="en-US" sz="2400" dirty="0"/>
+          </a:p>
+        </p:txBody>
+      </p:sp>
+      <p:sp>
+        <p:nvSpPr>
+          <p:cNvPr id="25" name="Slide Number Placeholder 0"/>
+          <p:cNvSpPr>
+            <a:spLocks noGrp="1"/>
+          </p:cNvSpPr>
+          <p:nvPr>
+            <p:ph type="sldNum" sz="quarter" idx="4294967295"/>
+          </p:nvPr>
+        </p:nvSpPr>
+        <p:spPr>
+          <a:xfrm>
+            <a:off x="10972800" y="6400800"/>
+            <a:ext cx="548640" cy="274320"/>
+          </a:xfrm>
+          <a:prstGeom prst="rect">
+            <a:avLst/>
+          </a:prstGeom>
+          <a:extLst>
+            <a:ext uri="{C572A759-6A51-4108-AA02-DFA0A04FC94B}">
+              <ma14:wrappingTextBoxFlag xmlns:ma14="http://schemas.microsoft.com/office/mac/drawingml/2011/main" val="0"/>
+            </a:ext>
+          </a:extLst>
+        </p:spPr>
+        <p:txBody>
+          <a:bodyPr/>
+          <a:lstStyle>
+            <a:lvl1pPr>
+              <a:defRPr sz="1000">
+                <a:solidFill>
+                  <a:srgbClr val="BFBFBF"/>
+                </a:solidFill>
+              </a:defRPr>
+            </a:lvl1pPr>
+          </a:lstStyle>
+          <a:p>
+            <a:pPr algn="r"/>
+            <a:fld id="{F7021451-1387-4CA6-816F-3879F97B5CBC}" type="slidenum">
+              <a:rPr b="0" lang="en-US"/>
+              <a:t>7</a:t>
             </a:fld>
             <a:endParaRPr lang="en-US"/>
           </a:p>

--- a/domain-seminars/week03_claims_data_analytics.pptx
+++ b/domain-seminars/week03_claims_data_analytics.pptx
@@ -1619,7 +1619,7 @@
                   <a:srgbClr val="FFFFFF"/>
                 </a:solidFill>
               </a:rPr>
-              <a:t>Claims Data Analytics</a:t>
+              <a:t>Week 3: Claims Data Analytics</a:t>
             </a:r>
             <a:endParaRPr lang="en-US" sz="4000" dirty="0"/>
           </a:p>
